--- a/docs/Stanford_vs_ECGFounder_3page.pptx
+++ b/docs/Stanford_vs_ECGFounder_3page.pptx
@@ -2155,7 +2155,7 @@
           </p:nvPr>
         </p:nvGraphicFramePr>
         <p:xfrm>
-          <a:off x="548640" y="4023360"/>
+          <a:off x="548640" y="3840480"/>
           <a:ext cx="11064240" cy="914400"/>
         </p:xfrm>
         <a:graphic>
@@ -2167,7 +2167,7 @@
                 <a:gridCol w="4204411"/>
                 <a:gridCol w="4204411"/>
               </a:tblGrid>
-              <a:tr h="475488">
+              <a:tr h="320040">
                 <a:tc>
                   <a:txBody>
                     <a:bodyPr/>
@@ -2373,7 +2373,7 @@
                   </a:tcPr>
                 </a:tc>
               </a:tr>
-              <a:tr h="475488">
+              <a:tr h="320040">
                 <a:tc>
                   <a:txBody>
                     <a:bodyPr/>
@@ -2573,7 +2573,7 @@
                   </a:tcPr>
                 </a:tc>
               </a:tr>
-              <a:tr h="475488">
+              <a:tr h="320040">
                 <a:tc>
                   <a:txBody>
                     <a:bodyPr/>
@@ -2773,7 +2773,7 @@
                   </a:tcPr>
                 </a:tc>
               </a:tr>
-              <a:tr h="475488">
+              <a:tr h="320040">
                 <a:tc>
                   <a:txBody>
                     <a:bodyPr/>
@@ -2973,7 +2973,7 @@
                   </a:tcPr>
                 </a:tc>
               </a:tr>
-              <a:tr h="475488">
+              <a:tr h="320040">
                 <a:tc>
                   <a:txBody>
                     <a:bodyPr/>
@@ -3173,7 +3173,7 @@
                   </a:tcPr>
                 </a:tc>
               </a:tr>
-              <a:tr h="475488">
+              <a:tr h="320040">
                 <a:tc>
                   <a:txBody>
                     <a:bodyPr/>
@@ -3373,7 +3373,7 @@
                   </a:tcPr>
                 </a:tc>
               </a:tr>
-              <a:tr h="475488">
+              <a:tr h="320040">
                 <a:tc>
                   <a:txBody>
                     <a:bodyPr/>
@@ -3525,6 +3525,206 @@
                           <a:cs typeface="Calibri" pitchFamily="34" charset="-120"/>
                         </a:rPr>
                         <a:t>Per-window multi-diagnosis</a:t>
+                      </a:r>
+                      <a:endParaRPr lang="en-US" sz="1300" dirty="0">
+                        <a:latin typeface="Calibri" charset="0"/>
+                        <a:ea typeface="Calibri" charset="0"/>
+                        <a:cs typeface="Calibri" charset="0"/>
+                      </a:endParaRPr>
+                    </a:p>
+                  </a:txBody>
+                  <a:tcPr marL="63500" marR="63500" marT="63500" marB="63500" anchor="ctr">
+                    <a:lnL w="6350" cap="flat" cmpd="sng" algn="ctr">
+                      <a:solidFill>
+                        <a:srgbClr val="D6DEE6"/>
+                      </a:solidFill>
+                      <a:prstDash val="solid"/>
+                      <a:round/>
+                      <a:headEnd type="none" w="med" len="med"/>
+                      <a:tailEnd type="none" w="med" len="med"/>
+                    </a:lnL>
+                    <a:lnR w="6350" cap="flat" cmpd="sng" algn="ctr">
+                      <a:solidFill>
+                        <a:srgbClr val="D6DEE6"/>
+                      </a:solidFill>
+                      <a:prstDash val="solid"/>
+                      <a:round/>
+                      <a:headEnd type="none" w="med" len="med"/>
+                      <a:tailEnd type="none" w="med" len="med"/>
+                    </a:lnR>
+                    <a:lnT w="6350" cap="flat" cmpd="sng" algn="ctr">
+                      <a:solidFill>
+                        <a:srgbClr val="D6DEE6"/>
+                      </a:solidFill>
+                      <a:prstDash val="solid"/>
+                      <a:round/>
+                      <a:headEnd type="none" w="med" len="med"/>
+                      <a:tailEnd type="none" w="med" len="med"/>
+                    </a:lnT>
+                    <a:lnB w="6350" cap="flat" cmpd="sng" algn="ctr">
+                      <a:solidFill>
+                        <a:srgbClr val="D6DEE6"/>
+                      </a:solidFill>
+                      <a:prstDash val="solid"/>
+                      <a:round/>
+                      <a:headEnd type="none" w="med" len="med"/>
+                      <a:tailEnd type="none" w="med" len="med"/>
+                    </a:lnB>
+                  </a:tcPr>
+                </a:tc>
+              </a:tr>
+              <a:tr h="320040">
+                <a:tc>
+                  <a:txBody>
+                    <a:bodyPr/>
+                    <a:lstStyle/>
+                    <a:p>
+                      <a:pPr indent="0" marL="0">
+                        <a:buNone/>
+                      </a:pPr>
+                      <a:r>
+                        <a:rPr lang="en-US" sz="1300" b="1" dirty="0">
+                          <a:solidFill>
+                            <a:srgbClr val="21295C"/>
+                          </a:solidFill>
+                          <a:latin typeface="Calibri" pitchFamily="34" charset="0"/>
+                          <a:ea typeface="Calibri" pitchFamily="34" charset="-122"/>
+                          <a:cs typeface="Calibri" pitchFamily="34" charset="-120"/>
+                        </a:rPr>
+                        <a:t>Cross-dataset labels</a:t>
+                      </a:r>
+                      <a:endParaRPr lang="en-US" sz="1300" dirty="0">
+                        <a:latin typeface="Calibri" charset="0"/>
+                        <a:ea typeface="Calibri" charset="0"/>
+                        <a:cs typeface="Calibri" charset="0"/>
+                      </a:endParaRPr>
+                    </a:p>
+                  </a:txBody>
+                  <a:tcPr marL="63500" marR="63500" marT="63500" marB="63500" anchor="ctr">
+                    <a:lnL w="6350" cap="flat" cmpd="sng" algn="ctr">
+                      <a:solidFill>
+                        <a:srgbClr val="D6DEE6"/>
+                      </a:solidFill>
+                      <a:prstDash val="solid"/>
+                      <a:round/>
+                      <a:headEnd type="none" w="med" len="med"/>
+                      <a:tailEnd type="none" w="med" len="med"/>
+                    </a:lnL>
+                    <a:lnR w="6350" cap="flat" cmpd="sng" algn="ctr">
+                      <a:solidFill>
+                        <a:srgbClr val="D6DEE6"/>
+                      </a:solidFill>
+                      <a:prstDash val="solid"/>
+                      <a:round/>
+                      <a:headEnd type="none" w="med" len="med"/>
+                      <a:tailEnd type="none" w="med" len="med"/>
+                    </a:lnR>
+                    <a:lnT w="6350" cap="flat" cmpd="sng" algn="ctr">
+                      <a:solidFill>
+                        <a:srgbClr val="D6DEE6"/>
+                      </a:solidFill>
+                      <a:prstDash val="solid"/>
+                      <a:round/>
+                      <a:headEnd type="none" w="med" len="med"/>
+                      <a:tailEnd type="none" w="med" len="med"/>
+                    </a:lnT>
+                    <a:lnB w="6350" cap="flat" cmpd="sng" algn="ctr">
+                      <a:solidFill>
+                        <a:srgbClr val="D6DEE6"/>
+                      </a:solidFill>
+                      <a:prstDash val="solid"/>
+                      <a:round/>
+                      <a:headEnd type="none" w="med" len="med"/>
+                      <a:tailEnd type="none" w="med" len="med"/>
+                    </a:lnB>
+                    <a:solidFill>
+                      <a:srgbClr val="F4F7FA"/>
+                    </a:solidFill>
+                  </a:tcPr>
+                </a:tc>
+                <a:tc>
+                  <a:txBody>
+                    <a:bodyPr/>
+                    <a:lstStyle/>
+                    <a:p>
+                      <a:pPr indent="0" marL="0">
+                        <a:buNone/>
+                      </a:pPr>
+                      <a:r>
+                        <a:rPr lang="en-US" sz="1300" b="1" dirty="0">
+                          <a:solidFill>
+                            <a:srgbClr val="1A2233"/>
+                          </a:solidFill>
+                          <a:latin typeface="Calibri" pitchFamily="34" charset="0"/>
+                          <a:ea typeface="Calibri" pitchFamily="34" charset="-122"/>
+                          <a:cs typeface="Calibri" pitchFamily="34" charset="-120"/>
+                        </a:rPr>
+                        <a:t>per-dataset; retrain or hand-map</a:t>
+                      </a:r>
+                      <a:endParaRPr lang="en-US" sz="1300" dirty="0">
+                        <a:latin typeface="Calibri" charset="0"/>
+                        <a:ea typeface="Calibri" charset="0"/>
+                        <a:cs typeface="Calibri" charset="0"/>
+                      </a:endParaRPr>
+                    </a:p>
+                  </a:txBody>
+                  <a:tcPr marL="63500" marR="63500" marT="63500" marB="63500" anchor="ctr">
+                    <a:lnL w="6350" cap="flat" cmpd="sng" algn="ctr">
+                      <a:solidFill>
+                        <a:srgbClr val="D6DEE6"/>
+                      </a:solidFill>
+                      <a:prstDash val="solid"/>
+                      <a:round/>
+                      <a:headEnd type="none" w="med" len="med"/>
+                      <a:tailEnd type="none" w="med" len="med"/>
+                    </a:lnL>
+                    <a:lnR w="6350" cap="flat" cmpd="sng" algn="ctr">
+                      <a:solidFill>
+                        <a:srgbClr val="D6DEE6"/>
+                      </a:solidFill>
+                      <a:prstDash val="solid"/>
+                      <a:round/>
+                      <a:headEnd type="none" w="med" len="med"/>
+                      <a:tailEnd type="none" w="med" len="med"/>
+                    </a:lnR>
+                    <a:lnT w="6350" cap="flat" cmpd="sng" algn="ctr">
+                      <a:solidFill>
+                        <a:srgbClr val="D6DEE6"/>
+                      </a:solidFill>
+                      <a:prstDash val="solid"/>
+                      <a:round/>
+                      <a:headEnd type="none" w="med" len="med"/>
+                      <a:tailEnd type="none" w="med" len="med"/>
+                    </a:lnT>
+                    <a:lnB w="6350" cap="flat" cmpd="sng" algn="ctr">
+                      <a:solidFill>
+                        <a:srgbClr val="D6DEE6"/>
+                      </a:solidFill>
+                      <a:prstDash val="solid"/>
+                      <a:round/>
+                      <a:headEnd type="none" w="med" len="med"/>
+                      <a:tailEnd type="none" w="med" len="med"/>
+                    </a:lnB>
+                  </a:tcPr>
+                </a:tc>
+                <a:tc>
+                  <a:txBody>
+                    <a:bodyPr/>
+                    <a:lstStyle/>
+                    <a:p>
+                      <a:pPr indent="0" marL="0">
+                        <a:buNone/>
+                      </a:pPr>
+                      <a:r>
+                        <a:rPr lang="en-US" sz="1300" b="1" dirty="0">
+                          <a:solidFill>
+                            <a:srgbClr val="1A2233"/>
+                          </a:solidFill>
+                          <a:latin typeface="Calibri" pitchFamily="34" charset="0"/>
+                          <a:ea typeface="Calibri" pitchFamily="34" charset="-122"/>
+                          <a:cs typeface="Calibri" pitchFamily="34" charset="-120"/>
+                        </a:rPr>
+                        <a:t>fixed 150-space; central map</a:t>
                       </a:r>
                       <a:endParaRPr lang="en-US" sz="1300" dirty="0">
                         <a:latin typeface="Calibri" charset="0"/>

--- a/docs/Stanford_vs_ECGFounder_3page.pptx
+++ b/docs/Stanford_vs_ECGFounder_3page.pptx
@@ -1336,7 +1336,7 @@
           <a:p>
             <a:pPr marL="342900" indent="-342900">
               <a:lnSpc>
-                <a:spcPct val="125000"/>
+                <a:spcPct val="120000"/>
               </a:lnSpc>
               <a:buSzPct val="100000"/>
               <a:buChar char="•"/>
@@ -1350,14 +1350,14 @@
                 <a:ea typeface="Calibri" pitchFamily="34" charset="-122"/>
                 <a:cs typeface="Calibri" pitchFamily="34" charset="-120"/>
               </a:rPr>
-              <a:t>Task-specific net, trained from scratch</a:t>
+              <a:t>91K records / 53.5K patients (Zio, 200 Hz)</a:t>
             </a:r>
             <a:endParaRPr lang="en-US" sz="1400" dirty="0"/>
           </a:p>
           <a:p>
             <a:pPr marL="342900" indent="-342900">
               <a:lnSpc>
-                <a:spcPct val="125000"/>
+                <a:spcPct val="120000"/>
               </a:lnSpc>
               <a:buSzPct val="100000"/>
               <a:buChar char="•"/>
@@ -1371,14 +1371,14 @@
                 <a:ea typeface="Calibri" pitchFamily="34" charset="-122"/>
                 <a:cs typeface="Calibri" pitchFamily="34" charset="-120"/>
               </a:rPr>
-              <a:t>Keras / TensorFlow</a:t>
+              <a:t>34-layer 1D ResNet, trained from scratch</a:t>
             </a:r>
             <a:endParaRPr lang="en-US" sz="1400" dirty="0"/>
           </a:p>
           <a:p>
             <a:pPr marL="342900" indent="-342900">
               <a:lnSpc>
-                <a:spcPct val="125000"/>
+                <a:spcPct val="120000"/>
               </a:lnSpc>
               <a:buSzPct val="100000"/>
               <a:buChar char="•"/>
@@ -1392,14 +1392,14 @@
                 <a:ea typeface="Calibri" pitchFamily="34" charset="-122"/>
                 <a:cs typeface="Calibri" pitchFamily="34" charset="-120"/>
               </a:rPr>
-              <a:t>Continuous ambulatory rhythm strips</a:t>
+              <a:t>12 classes; 1 label / 1.28 s (seq-to-seq)</a:t>
             </a:r>
             <a:endParaRPr lang="en-US" sz="1400" dirty="0"/>
           </a:p>
           <a:p>
             <a:pPr marL="342900" indent="-342900">
               <a:lnSpc>
-                <a:spcPct val="125000"/>
+                <a:spcPct val="120000"/>
               </a:lnSpc>
               <a:buSzPct val="100000"/>
               <a:buChar char="•"/>
@@ -1413,7 +1413,7 @@
                 <a:ea typeface="Calibri" pitchFamily="34" charset="-122"/>
                 <a:cs typeface="Calibri" pitchFamily="34" charset="-120"/>
               </a:rPr>
-              <a:t>Few classes, one rhythm per segment</a:t>
+              <a:t>AUC 0.97 &gt; cardiologist (F1 .837 vs .780)</a:t>
             </a:r>
             <a:endParaRPr lang="en-US" sz="1400" dirty="0"/>
           </a:p>
@@ -1536,7 +1536,7 @@
                 <a:ea typeface="Calibri" pitchFamily="34" charset="-122"/>
                 <a:cs typeface="Calibri" pitchFamily="34" charset="-120"/>
               </a:rPr>
-              <a:t>Foundation model, pretrained on millions of ECGs</a:t>
+              <a:t>Li et al. 2025 (arXiv 2410.04133) - our base model</a:t>
             </a:r>
             <a:endParaRPr lang="en-US" sz="1200" dirty="0"/>
           </a:p>
@@ -1565,7 +1565,7 @@
           <a:p>
             <a:pPr marL="342900" indent="-342900">
               <a:lnSpc>
-                <a:spcPct val="125000"/>
+                <a:spcPct val="120000"/>
               </a:lnSpc>
               <a:buSzPct val="100000"/>
               <a:buChar char="•"/>
@@ -1579,14 +1579,14 @@
                 <a:ea typeface="Calibri" pitchFamily="34" charset="-122"/>
                 <a:cs typeface="Calibri" pitchFamily="34" charset="-120"/>
               </a:rPr>
-              <a:t>Pretrained backbone, then fine-tuned</a:t>
+              <a:t>10.8M ECGs / 1.8M subjects; 150 labels</a:t>
             </a:r>
             <a:endParaRPr lang="en-US" sz="1400" dirty="0"/>
           </a:p>
           <a:p>
             <a:pPr marL="342900" indent="-342900">
               <a:lnSpc>
-                <a:spcPct val="125000"/>
+                <a:spcPct val="120000"/>
               </a:lnSpc>
               <a:buSzPct val="100000"/>
               <a:buChar char="•"/>
@@ -1600,14 +1600,14 @@
                 <a:ea typeface="Calibri" pitchFamily="34" charset="-122"/>
                 <a:cs typeface="Calibri" pitchFamily="34" charset="-120"/>
               </a:rPr>
-              <a:t>PyTorch (Net1D, ~30.8M params)</a:t>
+              <a:t>Net1D/RegNet foundation; PU-learning loss</a:t>
             </a:r>
             <a:endParaRPr lang="en-US" sz="1400" dirty="0"/>
           </a:p>
           <a:p>
             <a:pPr marL="342900" indent="-342900">
               <a:lnSpc>
-                <a:spcPct val="125000"/>
+                <a:spcPct val="120000"/>
               </a:lnSpc>
               <a:buSzPct val="100000"/>
               <a:buChar char="•"/>
@@ -1621,14 +1621,14 @@
                 <a:ea typeface="Calibri" pitchFamily="34" charset="-122"/>
                 <a:cs typeface="Calibri" pitchFamily="34" charset="-120"/>
               </a:rPr>
-              <a:t>Per-window multi-label diagnosis</a:t>
+              <a:t>Single-lead = lead augmentation (our fuzzy)</a:t>
             </a:r>
             <a:endParaRPr lang="en-US" sz="1400" dirty="0"/>
           </a:p>
           <a:p>
             <a:pPr marL="342900" indent="-342900">
               <a:lnSpc>
-                <a:spcPct val="125000"/>
+                <a:spcPct val="120000"/>
               </a:lnSpc>
               <a:buSzPct val="100000"/>
               <a:buChar char="•"/>
@@ -1642,7 +1642,7 @@
                 <a:ea typeface="Calibri" pitchFamily="34" charset="-122"/>
                 <a:cs typeface="Calibri" pitchFamily="34" charset="-120"/>
               </a:rPr>
-              <a:t>150 classes, co-occurring diagnoses</a:t>
+              <a:t>Committee AUROC .968; CODE-test .981</a:t>
             </a:r>
             <a:endParaRPr lang="en-US" sz="1400" dirty="0"/>
           </a:p>
@@ -1943,7 +1943,7 @@
                 <a:ea typeface="Calibri" pitchFamily="34" charset="-122"/>
                 <a:cs typeface="Calibri" pitchFamily="34" charset="-120"/>
               </a:rPr>
-              <a:t>One label per ~1.3 s segment</a:t>
+              <a:t>One label per 1.28 s segment (256 samp @ 200 Hz)</a:t>
             </a:r>
             <a:endParaRPr lang="en-US" sz="1250" dirty="0"/>
           </a:p>
@@ -2459,7 +2459,7 @@
                           <a:ea typeface="Calibri" pitchFamily="34" charset="-122"/>
                           <a:cs typeface="Calibri" pitchFamily="34" charset="-120"/>
                         </a:rPr>
-                        <a:t>Sequence: 1 label / ~1.3 s</a:t>
+                        <a:t>Sequence: 1 label / 1.28 s</a:t>
                       </a:r>
                       <a:endParaRPr lang="en-US" sz="1300" dirty="0">
                         <a:latin typeface="Calibri" charset="0"/>
